--- a/assets/pptx/catalog-132.pptx
+++ b/assets/pptx/catalog-132.pptx
@@ -3247,7 +3247,7 @@
                 <a:ea typeface="Ebrima"/>
                 <a:cs typeface="Ebrima"/>
               </a:rPr>
-              <a:t>ማራናታ ሆ ማራናታ (3)</a:t>
+              <a:t>ማራናታ ሆ ማራናታ 3</a:t>
             </a:r>
           </a:p>
           <a:p>
@@ -3332,7 +3332,7 @@
                 <a:ea typeface="Ebrima"/>
                 <a:cs typeface="Ebrima"/>
               </a:rPr>
-              <a:t>ማራናታ ሆ ማራናታ (3)</a:t>
+              <a:t>ማራናታ ሆ ማራናታ 3</a:t>
             </a:r>
           </a:p>
           <a:p>
@@ -3471,7 +3471,7 @@
                 <a:ea typeface="Ebrima"/>
                 <a:cs typeface="Ebrima"/>
               </a:rPr>
-              <a:t>ጌታ እየሱሴ ና እልሀለው (2)</a:t>
+              <a:t>ጌታ እየሱሴ ና እልሀለው 2</a:t>
             </a:r>
           </a:p>
         </p:txBody>
@@ -3538,7 +3538,7 @@
                 <a:ea typeface="Ebrima"/>
                 <a:cs typeface="Ebrima"/>
               </a:rPr>
-              <a:t>ና ና ና ና (2)</a:t>
+              <a:t>ና ና ና ና 2</a:t>
             </a:r>
           </a:p>
         </p:txBody>
@@ -3605,7 +3605,7 @@
                 <a:ea typeface="Ebrima"/>
                 <a:cs typeface="Ebrima"/>
               </a:rPr>
-              <a:t>ማራናታ ሆ ማራናታ (3)</a:t>
+              <a:t>ማራናታ ሆ ማራናታ 3</a:t>
             </a:r>
           </a:p>
           <a:p>
@@ -3623,7 +3623,7 @@
                 <a:ea typeface="Ebrima"/>
                 <a:cs typeface="Ebrima"/>
               </a:rPr>
-              <a:t>ኣሜን ጌታ እየሱስ ቶሎ ና (2)</a:t>
+              <a:t>ኣሜን ጌታ እየሱስ ቶሎ ና 2</a:t>
             </a:r>
           </a:p>
         </p:txBody>
@@ -3744,7 +3744,7 @@
                 <a:ea typeface="Ebrima"/>
                 <a:cs typeface="Ebrima"/>
               </a:rPr>
-              <a:t>ቶሎ ና እላለሁ ጌታ ሆይ (2)</a:t>
+              <a:t>ቶሎ ና እላለሁ ጌታ ሆይ 2</a:t>
             </a:r>
           </a:p>
         </p:txBody>
@@ -3811,7 +3811,7 @@
                 <a:ea typeface="Ebrima"/>
                 <a:cs typeface="Ebrima"/>
               </a:rPr>
-              <a:t>ና ና ና ና (2)</a:t>
+              <a:t>ና ና ና ና 2</a:t>
             </a:r>
           </a:p>
         </p:txBody>
